--- a/AgenticAI/4-Agent-Architecture/Multi_Agent_System-pt1.pptx
+++ b/AgenticAI/4-Agent-Architecture/Multi_Agent_System-pt1.pptx
@@ -230,7 +230,7 @@
           <a:p>
             <a:fld id="{7BAEECA8-D063-486F-AE31-5020270C1449}" type="datetimeFigureOut">
               <a:rPr lang="en-US" smtClean="0"/>
-              <a:t>6/22/2026</a:t>
+              <a:t>8/29/2026</a:t>
             </a:fld>
             <a:endParaRPr lang="en-US"/>
           </a:p>
@@ -407,7 +407,7 @@
           <a:p>
             <a:fld id="{CB233BD1-3BA8-448D-9D08-7846095EA517}" type="datetimeFigureOut">
               <a:rPr lang="en-US" smtClean="0"/>
-              <a:t>6/22/2026</a:t>
+              <a:t>8/29/2026</a:t>
             </a:fld>
             <a:endParaRPr lang="en-US"/>
           </a:p>
@@ -821,7 +821,7 @@
           <a:p>
             <a:fld id="{6383FAE1-13DE-4511-8C1B-C8AFB720664C}" type="datetimeFigureOut">
               <a:rPr lang="en-US" smtClean="0"/>
-              <a:t>6/22/2026</a:t>
+              <a:t>8/29/2026</a:t>
             </a:fld>
             <a:endParaRPr lang="en-US"/>
           </a:p>
@@ -1019,7 +1019,7 @@
           <a:p>
             <a:fld id="{6383FAE1-13DE-4511-8C1B-C8AFB720664C}" type="datetimeFigureOut">
               <a:rPr lang="en-US" smtClean="0"/>
-              <a:t>6/22/2026</a:t>
+              <a:t>8/29/2026</a:t>
             </a:fld>
             <a:endParaRPr lang="en-US"/>
           </a:p>
@@ -1227,7 +1227,7 @@
           <a:p>
             <a:fld id="{6383FAE1-13DE-4511-8C1B-C8AFB720664C}" type="datetimeFigureOut">
               <a:rPr lang="en-US" smtClean="0"/>
-              <a:t>6/22/2026</a:t>
+              <a:t>8/29/2026</a:t>
             </a:fld>
             <a:endParaRPr lang="en-US"/>
           </a:p>
@@ -1425,7 +1425,7 @@
           <a:p>
             <a:fld id="{6383FAE1-13DE-4511-8C1B-C8AFB720664C}" type="datetimeFigureOut">
               <a:rPr lang="en-US" smtClean="0"/>
-              <a:t>6/22/2026</a:t>
+              <a:t>8/29/2026</a:t>
             </a:fld>
             <a:endParaRPr lang="en-US"/>
           </a:p>
@@ -1700,7 +1700,7 @@
           <a:p>
             <a:fld id="{6383FAE1-13DE-4511-8C1B-C8AFB720664C}" type="datetimeFigureOut">
               <a:rPr lang="en-US" smtClean="0"/>
-              <a:t>6/22/2026</a:t>
+              <a:t>8/29/2026</a:t>
             </a:fld>
             <a:endParaRPr lang="en-US"/>
           </a:p>
@@ -1965,7 +1965,7 @@
           <a:p>
             <a:fld id="{6383FAE1-13DE-4511-8C1B-C8AFB720664C}" type="datetimeFigureOut">
               <a:rPr lang="en-US" smtClean="0"/>
-              <a:t>6/22/2026</a:t>
+              <a:t>8/29/2026</a:t>
             </a:fld>
             <a:endParaRPr lang="en-US"/>
           </a:p>
@@ -2377,7 +2377,7 @@
           <a:p>
             <a:fld id="{6383FAE1-13DE-4511-8C1B-C8AFB720664C}" type="datetimeFigureOut">
               <a:rPr lang="en-US" smtClean="0"/>
-              <a:t>6/22/2026</a:t>
+              <a:t>8/29/2026</a:t>
             </a:fld>
             <a:endParaRPr lang="en-US"/>
           </a:p>
@@ -2518,7 +2518,7 @@
           <a:p>
             <a:fld id="{6383FAE1-13DE-4511-8C1B-C8AFB720664C}" type="datetimeFigureOut">
               <a:rPr lang="en-US" smtClean="0"/>
-              <a:t>6/22/2026</a:t>
+              <a:t>8/29/2026</a:t>
             </a:fld>
             <a:endParaRPr lang="en-US"/>
           </a:p>
@@ -2631,7 +2631,7 @@
           <a:p>
             <a:fld id="{6383FAE1-13DE-4511-8C1B-C8AFB720664C}" type="datetimeFigureOut">
               <a:rPr lang="en-US" smtClean="0"/>
-              <a:t>6/22/2026</a:t>
+              <a:t>8/29/2026</a:t>
             </a:fld>
             <a:endParaRPr lang="en-US"/>
           </a:p>
@@ -2942,7 +2942,7 @@
           <a:p>
             <a:fld id="{6383FAE1-13DE-4511-8C1B-C8AFB720664C}" type="datetimeFigureOut">
               <a:rPr lang="en-US" smtClean="0"/>
-              <a:t>6/22/2026</a:t>
+              <a:t>8/29/2026</a:t>
             </a:fld>
             <a:endParaRPr lang="en-US"/>
           </a:p>
@@ -3233,7 +3233,7 @@
           <a:p>
             <a:fld id="{6383FAE1-13DE-4511-8C1B-C8AFB720664C}" type="datetimeFigureOut">
               <a:rPr lang="en-US" smtClean="0"/>
-              <a:t>6/22/2026</a:t>
+              <a:t>8/29/2026</a:t>
             </a:fld>
             <a:endParaRPr lang="en-US"/>
           </a:p>
@@ -3477,7 +3477,7 @@
           <a:p>
             <a:fld id="{6383FAE1-13DE-4511-8C1B-C8AFB720664C}" type="datetimeFigureOut">
               <a:rPr lang="en-US" smtClean="0"/>
-              <a:t>6/22/2026</a:t>
+              <a:t>8/29/2026</a:t>
             </a:fld>
             <a:endParaRPr lang="en-US"/>
           </a:p>
@@ -7708,7 +7708,7 @@
         <p:spPr>
           <a:xfrm>
             <a:off x="197459" y="474345"/>
-            <a:ext cx="9595765" cy="5632311"/>
+            <a:ext cx="10830205" cy="6001643"/>
           </a:xfrm>
           <a:prstGeom prst="rect">
             <a:avLst/>
@@ -7799,19 +7799,33 @@
             </a:endParaRPr>
           </a:p>
           <a:p>
+            <a:pPr marL="342900" indent="-342900">
+              <a:buFont typeface="Arial" panose="020B0604020202020204" pitchFamily="34" charset="0"/>
+              <a:buChar char="•"/>
+            </a:pPr>
+            <a:endParaRPr lang="en-US" sz="2400" dirty="0">
+              <a:solidFill>
+                <a:schemeClr val="accent6">
+                  <a:lumMod val="60000"/>
+                  <a:lumOff val="40000"/>
+                </a:schemeClr>
+              </a:solidFill>
+            </a:endParaRPr>
+          </a:p>
+          <a:p>
             <a:pPr marL="0" indent="0">
               <a:buNone/>
             </a:pPr>
             <a:r>
-              <a:rPr lang="en-US" sz="2400" dirty="0">
-                <a:solidFill>
-                  <a:schemeClr val="accent6">
-                    <a:lumMod val="60000"/>
-                    <a:lumOff val="40000"/>
-                  </a:schemeClr>
-                </a:solidFill>
-              </a:rPr>
-              <a:t>Example: Imagine an agent interacting with a user and calling tools to:</a:t>
+              <a:rPr lang="en-US" sz="2400" b="1" u="sng" dirty="0">
+                <a:solidFill>
+                  <a:schemeClr val="accent6">
+                    <a:lumMod val="60000"/>
+                    <a:lumOff val="40000"/>
+                  </a:schemeClr>
+                </a:solidFill>
+              </a:rPr>
+              <a:t>Example: </a:t>
             </a:r>
           </a:p>
           <a:p>
@@ -7827,7 +7841,7 @@
                   </a:schemeClr>
                 </a:solidFill>
               </a:rPr>
-              <a:t>1. Retrieve data       - Consumes 10K tokens</a:t>
+              <a:t>Imagine an agent interacting with a user and calling tools to:</a:t>
             </a:r>
           </a:p>
           <a:p>
@@ -7843,7 +7857,7 @@
                   </a:schemeClr>
                 </a:solidFill>
               </a:rPr>
-              <a:t>2. Analyze it              - Consumes 30K tokens</a:t>
+              <a:t>1. Retrieve data       - Consumes 10K tokens</a:t>
             </a:r>
           </a:p>
           <a:p>
@@ -7859,8 +7873,37 @@
                   </a:schemeClr>
                 </a:solidFill>
               </a:rPr>
+              <a:t>2. Analyze it              - Consumes 30K tokens</a:t>
+            </a:r>
+          </a:p>
+          <a:p>
+            <a:pPr marL="0" indent="0">
+              <a:buNone/>
+            </a:pPr>
+            <a:r>
+              <a:rPr lang="en-US" sz="2400" dirty="0">
+                <a:solidFill>
+                  <a:schemeClr val="accent6">
+                    <a:lumMod val="60000"/>
+                    <a:lumOff val="40000"/>
+                  </a:schemeClr>
+                </a:solidFill>
+              </a:rPr>
               <a:t>3. Generate a report  - Consumes 40K token </a:t>
             </a:r>
+          </a:p>
+          <a:p>
+            <a:pPr marL="0" indent="0">
+              <a:buNone/>
+            </a:pPr>
+            <a:endParaRPr lang="en-US" sz="2400" dirty="0">
+              <a:solidFill>
+                <a:schemeClr val="accent6">
+                  <a:lumMod val="60000"/>
+                  <a:lumOff val="40000"/>
+                </a:schemeClr>
+              </a:solidFill>
+            </a:endParaRPr>
           </a:p>
           <a:p>
             <a:pPr marL="0" indent="0">
@@ -8076,7 +8119,7 @@
         <p:spPr>
           <a:xfrm>
             <a:off x="250529" y="269906"/>
-            <a:ext cx="9267843" cy="3785652"/>
+            <a:ext cx="9267843" cy="4154984"/>
           </a:xfrm>
           <a:prstGeom prst="rect">
             <a:avLst/>
@@ -8171,6 +8214,22 @@
               <a:buNone/>
             </a:pPr>
             <a:r>
+              <a:rPr lang="en-US" sz="2400" b="1" u="sng" dirty="0">
+                <a:solidFill>
+                  <a:schemeClr val="accent6">
+                    <a:lumMod val="60000"/>
+                    <a:lumOff val="40000"/>
+                  </a:schemeClr>
+                </a:solidFill>
+              </a:rPr>
+              <a:t>Example: </a:t>
+            </a:r>
+          </a:p>
+          <a:p>
+            <a:pPr marL="0" indent="0">
+              <a:buNone/>
+            </a:pPr>
+            <a:r>
               <a:rPr lang="en-US" sz="2400" dirty="0">
                 <a:solidFill>
                   <a:schemeClr val="accent6">
@@ -8179,7 +8238,7 @@
                   </a:schemeClr>
                 </a:solidFill>
               </a:rPr>
-              <a:t>Example: A user needs an AI assistant to:</a:t>
+              <a:t>A user needs an AI assistant to</a:t>
             </a:r>
           </a:p>
           <a:p>
@@ -8739,7 +8798,7 @@
         <p:spPr>
           <a:xfrm>
             <a:off x="379476" y="80014"/>
-            <a:ext cx="11045952" cy="1569660"/>
+            <a:ext cx="11045952" cy="1200329"/>
           </a:xfrm>
           <a:prstGeom prst="rect">
             <a:avLst/>
@@ -8816,30 +8875,14 @@
               <a:t>) -&gt; Single Agent is taking too much time. The task can be parallelized.</a:t>
             </a:r>
           </a:p>
-          <a:p>
-            <a:pPr marL="0" indent="0" fontAlgn="base">
-              <a:buNone/>
-            </a:pPr>
-            <a:r>
-              <a:rPr lang="en-US" sz="2400" dirty="0">
-                <a:solidFill>
-                  <a:schemeClr val="accent6">
-                    <a:lumMod val="60000"/>
-                    <a:lumOff val="40000"/>
-                  </a:schemeClr>
-                </a:solidFill>
-              </a:rPr>
-              <a:t>Solution -&gt; Split single agent into multiple agent. Each agent can work in  parallel</a:t>
-            </a:r>
-          </a:p>
-        </p:txBody>
-      </p:sp>
-      <p:sp>
-        <p:nvSpPr>
-          <p:cNvPr id="6" name="Oval 5">
-            <a:extLst>
-              <a:ext uri="{FF2B5EF4-FFF2-40B4-BE49-F238E27FC236}">
-                <a16:creationId xmlns:a16="http://schemas.microsoft.com/office/drawing/2014/main" id="{83DA42BC-C546-1A98-4E16-1709AC0E3555}"/>
+        </p:txBody>
+      </p:sp>
+      <p:sp>
+        <p:nvSpPr>
+          <p:cNvPr id="2" name="Oval 1">
+            <a:extLst>
+              <a:ext uri="{FF2B5EF4-FFF2-40B4-BE49-F238E27FC236}">
+                <a16:creationId xmlns:a16="http://schemas.microsoft.com/office/drawing/2014/main" id="{6C521185-7603-BBFE-FDB6-55C425946A62}"/>
               </a:ext>
             </a:extLst>
           </p:cNvPr>
@@ -8848,56 +8891,7 @@
         </p:nvSpPr>
         <p:spPr>
           <a:xfrm>
-            <a:off x="1152143" y="4092999"/>
-            <a:ext cx="2980944" cy="2616639"/>
-          </a:xfrm>
-          <a:prstGeom prst="ellipse">
-            <a:avLst/>
-          </a:prstGeom>
-        </p:spPr>
-        <p:style>
-          <a:lnRef idx="2">
-            <a:schemeClr val="accent1">
-              <a:shade val="15000"/>
-            </a:schemeClr>
-          </a:lnRef>
-          <a:fillRef idx="1">
-            <a:schemeClr val="accent1"/>
-          </a:fillRef>
-          <a:effectRef idx="0">
-            <a:schemeClr val="accent1"/>
-          </a:effectRef>
-          <a:fontRef idx="minor">
-            <a:schemeClr val="lt1"/>
-          </a:fontRef>
-        </p:style>
-        <p:txBody>
-          <a:bodyPr rtlCol="0" anchor="ctr"/>
-          <a:lstStyle/>
-          <a:p>
-            <a:pPr algn="ctr"/>
-            <a:r>
-              <a:rPr lang="en-US" sz="2800" dirty="0"/>
-              <a:t>Single Agent</a:t>
-            </a:r>
-          </a:p>
-        </p:txBody>
-      </p:sp>
-      <p:sp>
-        <p:nvSpPr>
-          <p:cNvPr id="2" name="Oval 1">
-            <a:extLst>
-              <a:ext uri="{FF2B5EF4-FFF2-40B4-BE49-F238E27FC236}">
-                <a16:creationId xmlns:a16="http://schemas.microsoft.com/office/drawing/2014/main" id="{6C521185-7603-BBFE-FDB6-55C425946A62}"/>
-              </a:ext>
-            </a:extLst>
-          </p:cNvPr>
-          <p:cNvSpPr/>
-          <p:nvPr/>
-        </p:nvSpPr>
-        <p:spPr>
-          <a:xfrm>
-            <a:off x="8058914" y="3230970"/>
+            <a:off x="8141209" y="3034657"/>
             <a:ext cx="3051045" cy="648604"/>
           </a:xfrm>
           <a:prstGeom prst="ellipse">
@@ -8946,7 +8940,7 @@
         </p:nvSpPr>
         <p:spPr>
           <a:xfrm>
-            <a:off x="8058914" y="4115814"/>
+            <a:off x="8088631" y="4070851"/>
             <a:ext cx="3366514" cy="652273"/>
           </a:xfrm>
           <a:prstGeom prst="ellipse">
@@ -8978,52 +8972,6 @@
               <a:rPr lang="en-US" sz="2000" dirty="0"/>
               <a:t>Agent1 – Fraud Score</a:t>
             </a:r>
-          </a:p>
-        </p:txBody>
-      </p:sp>
-      <p:sp>
-        <p:nvSpPr>
-          <p:cNvPr id="7" name="Arrow: Right 6">
-            <a:extLst>
-              <a:ext uri="{FF2B5EF4-FFF2-40B4-BE49-F238E27FC236}">
-                <a16:creationId xmlns:a16="http://schemas.microsoft.com/office/drawing/2014/main" id="{DE0ABAE9-8817-1CBC-35A2-0AF2FDFD0B78}"/>
-              </a:ext>
-            </a:extLst>
-          </p:cNvPr>
-          <p:cNvSpPr/>
-          <p:nvPr/>
-        </p:nvSpPr>
-        <p:spPr>
-          <a:xfrm>
-            <a:off x="4577333" y="4907982"/>
-            <a:ext cx="1618488" cy="652273"/>
-          </a:xfrm>
-          <a:prstGeom prst="rightArrow">
-            <a:avLst/>
-          </a:prstGeom>
-        </p:spPr>
-        <p:style>
-          <a:lnRef idx="2">
-            <a:schemeClr val="accent1">
-              <a:shade val="15000"/>
-            </a:schemeClr>
-          </a:lnRef>
-          <a:fillRef idx="1">
-            <a:schemeClr val="accent1"/>
-          </a:fillRef>
-          <a:effectRef idx="0">
-            <a:schemeClr val="accent1"/>
-          </a:effectRef>
-          <a:fontRef idx="minor">
-            <a:schemeClr val="lt1"/>
-          </a:fontRef>
-        </p:style>
-        <p:txBody>
-          <a:bodyPr rtlCol="0" anchor="ctr"/>
-          <a:lstStyle/>
-          <a:p>
-            <a:pPr algn="ctr"/>
-            <a:endParaRPr lang="en-US"/>
           </a:p>
         </p:txBody>
       </p:sp>
@@ -9090,7 +9038,7 @@
         </p:nvSpPr>
         <p:spPr>
           <a:xfrm>
-            <a:off x="8058914" y="1917621"/>
+            <a:off x="8281417" y="1699440"/>
             <a:ext cx="2839211" cy="842389"/>
           </a:xfrm>
           <a:prstGeom prst="ellipse">
@@ -9139,7 +9087,7 @@
         </p:nvSpPr>
         <p:spPr>
           <a:xfrm>
-            <a:off x="8138162" y="5892840"/>
+            <a:off x="8281417" y="6021412"/>
             <a:ext cx="3051045" cy="648604"/>
           </a:xfrm>
           <a:prstGeom prst="ellipse">
@@ -9188,7 +9136,7 @@
         </p:nvSpPr>
         <p:spPr>
           <a:xfrm>
-            <a:off x="9432036" y="2760010"/>
+            <a:off x="9508236" y="2625432"/>
             <a:ext cx="374904" cy="348950"/>
           </a:xfrm>
           <a:prstGeom prst="downArrow">
@@ -9234,7 +9182,7 @@
         </p:nvSpPr>
         <p:spPr>
           <a:xfrm>
-            <a:off x="9479280" y="3766864"/>
+            <a:off x="9479279" y="3725062"/>
             <a:ext cx="374904" cy="348950"/>
           </a:xfrm>
           <a:prstGeom prst="downArrow">
@@ -9326,7 +9274,7 @@
         </p:nvSpPr>
         <p:spPr>
           <a:xfrm>
-            <a:off x="9554719" y="5560255"/>
+            <a:off x="9584436" y="5673328"/>
             <a:ext cx="374904" cy="348950"/>
           </a:xfrm>
           <a:prstGeom prst="downArrow">
@@ -9373,7 +9321,7 @@
         <p:spPr>
           <a:xfrm>
             <a:off x="228598" y="1746473"/>
-            <a:ext cx="7679438" cy="2677656"/>
+            <a:ext cx="7679438" cy="3785652"/>
           </a:xfrm>
           <a:prstGeom prst="rect">
             <a:avLst/>
@@ -9438,7 +9386,29 @@
                   </a:schemeClr>
                 </a:solidFill>
               </a:rPr>
-              <a:t>check the customer's history , ~40ms</a:t>
+              <a:t>check the customer's </a:t>
+            </a:r>
+            <a:r>
+              <a:rPr lang="en-US" sz="2400" b="1" dirty="0">
+                <a:solidFill>
+                  <a:schemeClr val="accent6">
+                    <a:lumMod val="60000"/>
+                    <a:lumOff val="40000"/>
+                  </a:schemeClr>
+                </a:solidFill>
+              </a:rPr>
+              <a:t>history</a:t>
+            </a:r>
+            <a:r>
+              <a:rPr lang="en-US" sz="2400" dirty="0">
+                <a:solidFill>
+                  <a:schemeClr val="accent6">
+                    <a:lumMod val="60000"/>
+                    <a:lumOff val="40000"/>
+                  </a:schemeClr>
+                </a:solidFill>
+              </a:rPr>
+              <a:t> , ~40ms</a:t>
             </a:r>
           </a:p>
           <a:p>
@@ -9447,6 +9417,17 @@
               <a:buChar char="•"/>
             </a:pPr>
             <a:r>
+              <a:rPr lang="en-US" sz="2400" b="1" dirty="0">
+                <a:solidFill>
+                  <a:schemeClr val="accent6">
+                    <a:lumMod val="60000"/>
+                    <a:lumOff val="40000"/>
+                  </a:schemeClr>
+                </a:solidFill>
+              </a:rPr>
+              <a:t>score</a:t>
+            </a:r>
+            <a:r>
               <a:rPr lang="en-US" sz="2400" dirty="0">
                 <a:solidFill>
                   <a:schemeClr val="accent6">
@@ -9455,7 +9436,7 @@
                   </a:schemeClr>
                 </a:solidFill>
               </a:rPr>
-              <a:t>score the transaction for fraud patterns, ~60ms </a:t>
+              <a:t> the transaction for fraud patterns, ~60ms </a:t>
             </a:r>
           </a:p>
           <a:p>
@@ -9472,10 +9453,19 @@
                   </a:schemeClr>
                 </a:solidFill>
               </a:rPr>
-              <a:t>verify telephone against a blacklist. ~20ms</a:t>
-            </a:r>
-          </a:p>
-          <a:p>
+              <a:t>verify telephone against a </a:t>
+            </a:r>
+            <a:r>
+              <a:rPr lang="en-US" sz="2400" b="1" dirty="0">
+                <a:solidFill>
+                  <a:schemeClr val="accent6">
+                    <a:lumMod val="60000"/>
+                    <a:lumOff val="40000"/>
+                  </a:schemeClr>
+                </a:solidFill>
+              </a:rPr>
+              <a:t>blacklist</a:t>
+            </a:r>
             <a:r>
               <a:rPr lang="en-US" sz="2400" dirty="0">
                 <a:solidFill>
@@ -9485,7 +9475,99 @@
                   </a:schemeClr>
                 </a:solidFill>
               </a:rPr>
+              <a:t>. ~20ms</a:t>
+            </a:r>
+          </a:p>
+          <a:p>
+            <a:r>
+              <a:rPr lang="en-US" sz="2400" dirty="0">
+                <a:solidFill>
+                  <a:schemeClr val="accent6">
+                    <a:lumMod val="60000"/>
+                    <a:lumOff val="40000"/>
+                  </a:schemeClr>
+                </a:solidFill>
+              </a:rPr>
               <a:t>Then the banks makes the decision. In SA, total time=120ms</a:t>
+            </a:r>
+          </a:p>
+          <a:p>
+            <a:endParaRPr lang="en-US" sz="2400" dirty="0">
+              <a:solidFill>
+                <a:schemeClr val="accent6">
+                  <a:lumMod val="60000"/>
+                  <a:lumOff val="40000"/>
+                </a:schemeClr>
+              </a:solidFill>
+            </a:endParaRPr>
+          </a:p>
+          <a:p>
+            <a:r>
+              <a:rPr lang="en-US" sz="2400" dirty="0">
+                <a:solidFill>
+                  <a:schemeClr val="accent6">
+                    <a:lumMod val="60000"/>
+                    <a:lumOff val="40000"/>
+                  </a:schemeClr>
+                </a:solidFill>
+              </a:rPr>
+              <a:t>A single agent would perform task in sequential manner -&gt; take more time than necessary.</a:t>
+            </a:r>
+          </a:p>
+        </p:txBody>
+      </p:sp>
+      <p:sp>
+        <p:nvSpPr>
+          <p:cNvPr id="16" name="TextBox 15">
+            <a:extLst>
+              <a:ext uri="{FF2B5EF4-FFF2-40B4-BE49-F238E27FC236}">
+                <a16:creationId xmlns:a16="http://schemas.microsoft.com/office/drawing/2014/main" id="{529A503E-D3A8-27ED-0C15-19C732CE15A8}"/>
+              </a:ext>
+            </a:extLst>
+          </p:cNvPr>
+          <p:cNvSpPr txBox="1"/>
+          <p:nvPr/>
+        </p:nvSpPr>
+        <p:spPr>
+          <a:xfrm>
+            <a:off x="150876" y="5946989"/>
+            <a:ext cx="7584948" cy="830997"/>
+          </a:xfrm>
+          <a:prstGeom prst="rect">
+            <a:avLst/>
+          </a:prstGeom>
+          <a:noFill/>
+        </p:spPr>
+        <p:txBody>
+          <a:bodyPr wrap="square">
+            <a:spAutoFit/>
+          </a:bodyPr>
+          <a:lstStyle/>
+          <a:p>
+            <a:pPr marL="0" indent="0" fontAlgn="base">
+              <a:buNone/>
+            </a:pPr>
+            <a:r>
+              <a:rPr lang="en-US" sz="2400" dirty="0">
+                <a:solidFill>
+                  <a:schemeClr val="accent6">
+                    <a:lumMod val="60000"/>
+                    <a:lumOff val="40000"/>
+                  </a:schemeClr>
+                </a:solidFill>
+              </a:rPr>
+              <a:t>Solution -&gt; Split single agent into multiple agent. Each agent can work in </a:t>
+            </a:r>
+            <a:r>
+              <a:rPr lang="en-US" sz="2400" b="1" dirty="0">
+                <a:solidFill>
+                  <a:schemeClr val="accent6">
+                    <a:lumMod val="60000"/>
+                    <a:lumOff val="40000"/>
+                  </a:schemeClr>
+                </a:solidFill>
+              </a:rPr>
+              <a:t>parallel</a:t>
             </a:r>
           </a:p>
         </p:txBody>
@@ -9548,7 +9630,7 @@
         </p:blipFill>
         <p:spPr>
           <a:xfrm>
-            <a:off x="4288536" y="171143"/>
+            <a:off x="4172712" y="79703"/>
             <a:ext cx="7903464" cy="5937942"/>
           </a:xfrm>
           <a:prstGeom prst="rect">
@@ -9570,8 +9652,8 @@
         </p:nvSpPr>
         <p:spPr>
           <a:xfrm>
-            <a:off x="115824" y="379583"/>
-            <a:ext cx="7482840" cy="430887"/>
+            <a:off x="115824" y="171143"/>
+            <a:ext cx="7482840" cy="5170646"/>
           </a:xfrm>
           <a:prstGeom prst="rect">
             <a:avLst/>
@@ -9593,8 +9675,69 @@
                   </a:schemeClr>
                 </a:solidFill>
               </a:rPr>
-              <a:t>MAS:</a:t>
-            </a:r>
+              <a:t>MAS:  </a:t>
+            </a:r>
+            <a:r>
+              <a:rPr lang="en-US" sz="2200" dirty="0">
+                <a:solidFill>
+                  <a:schemeClr val="accent6">
+                    <a:lumMod val="60000"/>
+                    <a:lumOff val="40000"/>
+                  </a:schemeClr>
+                </a:solidFill>
+              </a:rPr>
+              <a:t>Create </a:t>
+            </a:r>
+            <a:r>
+              <a:rPr lang="en-US" sz="2200" b="1" dirty="0">
+                <a:solidFill>
+                  <a:schemeClr val="accent6">
+                    <a:lumMod val="60000"/>
+                    <a:lumOff val="40000"/>
+                  </a:schemeClr>
+                </a:solidFill>
+              </a:rPr>
+              <a:t>5 AI agents. </a:t>
+            </a:r>
+          </a:p>
+          <a:p>
+            <a:r>
+              <a:rPr lang="en-US" sz="2200" b="1" dirty="0">
+                <a:solidFill>
+                  <a:schemeClr val="accent6">
+                    <a:lumMod val="60000"/>
+                    <a:lumOff val="40000"/>
+                  </a:schemeClr>
+                </a:solidFill>
+              </a:rPr>
+              <a:t>1) Orchestrator</a:t>
+            </a:r>
+            <a:r>
+              <a:rPr lang="en-US" sz="2200" dirty="0">
+                <a:solidFill>
+                  <a:schemeClr val="accent6">
+                    <a:lumMod val="60000"/>
+                    <a:lumOff val="40000"/>
+                  </a:schemeClr>
+                </a:solidFill>
+              </a:rPr>
+              <a:t> </a:t>
+            </a:r>
+          </a:p>
+          <a:p>
+            <a:r>
+              <a:rPr lang="en-US" sz="2200" dirty="0">
+                <a:solidFill>
+                  <a:schemeClr val="accent6">
+                    <a:lumMod val="60000"/>
+                    <a:lumOff val="40000"/>
+                  </a:schemeClr>
+                </a:solidFill>
+              </a:rPr>
+              <a:t>(Fans out tasks in parallel)</a:t>
+            </a:r>
+          </a:p>
+          <a:p>
             <a:endParaRPr lang="en-US" sz="2200" dirty="0">
               <a:solidFill>
                 <a:schemeClr val="accent6">
@@ -9604,6 +9747,190 @@
               </a:solidFill>
             </a:endParaRPr>
           </a:p>
+          <a:p>
+            <a:pPr lvl="0"/>
+            <a:r>
+              <a:rPr lang="en-US" sz="2200" b="1" dirty="0">
+                <a:solidFill>
+                  <a:schemeClr val="accent6">
+                    <a:lumMod val="60000"/>
+                    <a:lumOff val="40000"/>
+                  </a:schemeClr>
+                </a:solidFill>
+              </a:rPr>
+              <a:t>2) History agent</a:t>
+            </a:r>
+          </a:p>
+          <a:p>
+            <a:pPr lvl="0"/>
+            <a:r>
+              <a:rPr lang="en-US" sz="2200" dirty="0">
+                <a:solidFill>
+                  <a:schemeClr val="accent6">
+                    <a:lumMod val="60000"/>
+                    <a:lumOff val="40000"/>
+                  </a:schemeClr>
+                </a:solidFill>
+              </a:rPr>
+              <a:t> (Analyzes past behavior and average spend)</a:t>
+            </a:r>
+          </a:p>
+          <a:p>
+            <a:pPr lvl="0"/>
+            <a:endParaRPr lang="en-US" sz="2200" dirty="0">
+              <a:solidFill>
+                <a:schemeClr val="accent6">
+                  <a:lumMod val="60000"/>
+                  <a:lumOff val="40000"/>
+                </a:schemeClr>
+              </a:solidFill>
+            </a:endParaRPr>
+          </a:p>
+          <a:p>
+            <a:pPr lvl="0"/>
+            <a:r>
+              <a:rPr lang="en-US" sz="2200" b="1" dirty="0">
+                <a:solidFill>
+                  <a:schemeClr val="accent6">
+                    <a:lumMod val="60000"/>
+                    <a:lumOff val="40000"/>
+                  </a:schemeClr>
+                </a:solidFill>
+              </a:rPr>
+              <a:t>3) Fraud scorer</a:t>
+            </a:r>
+            <a:r>
+              <a:rPr lang="en-US" sz="2200" dirty="0">
+                <a:solidFill>
+                  <a:schemeClr val="accent6">
+                    <a:lumMod val="60000"/>
+                    <a:lumOff val="40000"/>
+                  </a:schemeClr>
+                </a:solidFill>
+              </a:rPr>
+              <a:t> </a:t>
+            </a:r>
+          </a:p>
+          <a:p>
+            <a:pPr lvl="0"/>
+            <a:r>
+              <a:rPr lang="en-US" sz="2200" dirty="0">
+                <a:solidFill>
+                  <a:schemeClr val="accent6">
+                    <a:lumMod val="60000"/>
+                    <a:lumOff val="40000"/>
+                  </a:schemeClr>
+                </a:solidFill>
+              </a:rPr>
+              <a:t>(Evaluates ML risk score)</a:t>
+            </a:r>
+          </a:p>
+          <a:p>
+            <a:pPr marL="457200" lvl="0" indent="-457200">
+              <a:buFont typeface="+mj-lt"/>
+              <a:buAutoNum type="arabicPeriod"/>
+            </a:pPr>
+            <a:endParaRPr lang="en-US" sz="2200" b="1" dirty="0">
+              <a:solidFill>
+                <a:schemeClr val="accent6">
+                  <a:lumMod val="60000"/>
+                  <a:lumOff val="40000"/>
+                </a:schemeClr>
+              </a:solidFill>
+            </a:endParaRPr>
+          </a:p>
+          <a:p>
+            <a:pPr lvl="0"/>
+            <a:r>
+              <a:rPr lang="en-US" sz="2200" b="1" dirty="0">
+                <a:solidFill>
+                  <a:schemeClr val="accent6">
+                    <a:lumMod val="60000"/>
+                    <a:lumOff val="40000"/>
+                  </a:schemeClr>
+                </a:solidFill>
+              </a:rPr>
+              <a:t>4) Blacklist agent</a:t>
+            </a:r>
+            <a:r>
+              <a:rPr lang="en-US" sz="2200" dirty="0">
+                <a:solidFill>
+                  <a:schemeClr val="accent6">
+                    <a:lumMod val="60000"/>
+                    <a:lumOff val="40000"/>
+                  </a:schemeClr>
+                </a:solidFill>
+              </a:rPr>
+              <a:t> </a:t>
+            </a:r>
+          </a:p>
+          <a:p>
+            <a:pPr lvl="0"/>
+            <a:r>
+              <a:rPr lang="en-US" sz="2200" dirty="0">
+                <a:solidFill>
+                  <a:schemeClr val="accent6">
+                    <a:lumMod val="60000"/>
+                    <a:lumOff val="40000"/>
+                  </a:schemeClr>
+                </a:solidFill>
+              </a:rPr>
+              <a:t>(Checks sanctions and stolen card databases)</a:t>
+            </a:r>
+          </a:p>
+          <a:p>
+            <a:pPr marL="457200" lvl="0" indent="-457200">
+              <a:buFont typeface="+mj-lt"/>
+              <a:buAutoNum type="arabicPeriod"/>
+            </a:pPr>
+            <a:endParaRPr lang="en-US" sz="2200" b="1" dirty="0">
+              <a:solidFill>
+                <a:schemeClr val="accent6">
+                  <a:lumMod val="60000"/>
+                  <a:lumOff val="40000"/>
+                </a:schemeClr>
+              </a:solidFill>
+            </a:endParaRPr>
+          </a:p>
+          <a:p>
+            <a:pPr lvl="0"/>
+            <a:r>
+              <a:rPr lang="en-US" sz="2200" b="1" dirty="0">
+                <a:solidFill>
+                  <a:schemeClr val="accent6">
+                    <a:lumMod val="60000"/>
+                    <a:lumOff val="40000"/>
+                  </a:schemeClr>
+                </a:solidFill>
+              </a:rPr>
+              <a:t>5) Decision agent</a:t>
+            </a:r>
+            <a:r>
+              <a:rPr lang="en-US" sz="2200" dirty="0">
+                <a:solidFill>
+                  <a:schemeClr val="accent6">
+                    <a:lumMod val="60000"/>
+                    <a:lumOff val="40000"/>
+                  </a:schemeClr>
+                </a:solidFill>
+              </a:rPr>
+              <a:t> </a:t>
+            </a:r>
+          </a:p>
+          <a:p>
+            <a:pPr lvl="0"/>
+            <a:r>
+              <a:rPr lang="en-US" sz="2200" dirty="0">
+                <a:solidFill>
+                  <a:schemeClr val="accent6">
+                    <a:lumMod val="60000"/>
+                    <a:lumOff val="40000"/>
+                  </a:schemeClr>
+                </a:solidFill>
+              </a:rPr>
+              <a:t>(Merges all signals and applies final rules)</a:t>
+            </a:r>
+          </a:p>
         </p:txBody>
       </p:sp>
       <p:sp>
@@ -9620,8 +9947,8 @@
         </p:nvSpPr>
         <p:spPr>
           <a:xfrm>
-            <a:off x="115824" y="5117196"/>
-            <a:ext cx="5745480" cy="1200329"/>
+            <a:off x="188976" y="5657671"/>
+            <a:ext cx="6175248" cy="1200329"/>
           </a:xfrm>
           <a:prstGeom prst="rect">
             <a:avLst/>

--- a/AgenticAI/4-Agent-Architecture/Multi_Agent_System-pt1.pptx
+++ b/AgenticAI/4-Agent-Architecture/Multi_Agent_System-pt1.pptx
@@ -230,7 +230,7 @@
           <a:p>
             <a:fld id="{7BAEECA8-D063-486F-AE31-5020270C1449}" type="datetimeFigureOut">
               <a:rPr lang="en-US" smtClean="0"/>
-              <a:t>8/29/2026</a:t>
+              <a:t>9/4/2026</a:t>
             </a:fld>
             <a:endParaRPr lang="en-US"/>
           </a:p>
@@ -407,7 +407,7 @@
           <a:p>
             <a:fld id="{CB233BD1-3BA8-448D-9D08-7846095EA517}" type="datetimeFigureOut">
               <a:rPr lang="en-US" smtClean="0"/>
-              <a:t>8/29/2026</a:t>
+              <a:t>9/4/2026</a:t>
             </a:fld>
             <a:endParaRPr lang="en-US"/>
           </a:p>
@@ -821,7 +821,7 @@
           <a:p>
             <a:fld id="{6383FAE1-13DE-4511-8C1B-C8AFB720664C}" type="datetimeFigureOut">
               <a:rPr lang="en-US" smtClean="0"/>
-              <a:t>8/29/2026</a:t>
+              <a:t>9/4/2026</a:t>
             </a:fld>
             <a:endParaRPr lang="en-US"/>
           </a:p>
@@ -1019,7 +1019,7 @@
           <a:p>
             <a:fld id="{6383FAE1-13DE-4511-8C1B-C8AFB720664C}" type="datetimeFigureOut">
               <a:rPr lang="en-US" smtClean="0"/>
-              <a:t>8/29/2026</a:t>
+              <a:t>9/4/2026</a:t>
             </a:fld>
             <a:endParaRPr lang="en-US"/>
           </a:p>
@@ -1227,7 +1227,7 @@
           <a:p>
             <a:fld id="{6383FAE1-13DE-4511-8C1B-C8AFB720664C}" type="datetimeFigureOut">
               <a:rPr lang="en-US" smtClean="0"/>
-              <a:t>8/29/2026</a:t>
+              <a:t>9/4/2026</a:t>
             </a:fld>
             <a:endParaRPr lang="en-US"/>
           </a:p>
@@ -1425,7 +1425,7 @@
           <a:p>
             <a:fld id="{6383FAE1-13DE-4511-8C1B-C8AFB720664C}" type="datetimeFigureOut">
               <a:rPr lang="en-US" smtClean="0"/>
-              <a:t>8/29/2026</a:t>
+              <a:t>9/4/2026</a:t>
             </a:fld>
             <a:endParaRPr lang="en-US"/>
           </a:p>
@@ -1700,7 +1700,7 @@
           <a:p>
             <a:fld id="{6383FAE1-13DE-4511-8C1B-C8AFB720664C}" type="datetimeFigureOut">
               <a:rPr lang="en-US" smtClean="0"/>
-              <a:t>8/29/2026</a:t>
+              <a:t>9/4/2026</a:t>
             </a:fld>
             <a:endParaRPr lang="en-US"/>
           </a:p>
@@ -1965,7 +1965,7 @@
           <a:p>
             <a:fld id="{6383FAE1-13DE-4511-8C1B-C8AFB720664C}" type="datetimeFigureOut">
               <a:rPr lang="en-US" smtClean="0"/>
-              <a:t>8/29/2026</a:t>
+              <a:t>9/4/2026</a:t>
             </a:fld>
             <a:endParaRPr lang="en-US"/>
           </a:p>
@@ -2377,7 +2377,7 @@
           <a:p>
             <a:fld id="{6383FAE1-13DE-4511-8C1B-C8AFB720664C}" type="datetimeFigureOut">
               <a:rPr lang="en-US" smtClean="0"/>
-              <a:t>8/29/2026</a:t>
+              <a:t>9/4/2026</a:t>
             </a:fld>
             <a:endParaRPr lang="en-US"/>
           </a:p>
@@ -2518,7 +2518,7 @@
           <a:p>
             <a:fld id="{6383FAE1-13DE-4511-8C1B-C8AFB720664C}" type="datetimeFigureOut">
               <a:rPr lang="en-US" smtClean="0"/>
-              <a:t>8/29/2026</a:t>
+              <a:t>9/4/2026</a:t>
             </a:fld>
             <a:endParaRPr lang="en-US"/>
           </a:p>
@@ -2631,7 +2631,7 @@
           <a:p>
             <a:fld id="{6383FAE1-13DE-4511-8C1B-C8AFB720664C}" type="datetimeFigureOut">
               <a:rPr lang="en-US" smtClean="0"/>
-              <a:t>8/29/2026</a:t>
+              <a:t>9/4/2026</a:t>
             </a:fld>
             <a:endParaRPr lang="en-US"/>
           </a:p>
@@ -2942,7 +2942,7 @@
           <a:p>
             <a:fld id="{6383FAE1-13DE-4511-8C1B-C8AFB720664C}" type="datetimeFigureOut">
               <a:rPr lang="en-US" smtClean="0"/>
-              <a:t>8/29/2026</a:t>
+              <a:t>9/4/2026</a:t>
             </a:fld>
             <a:endParaRPr lang="en-US"/>
           </a:p>
@@ -3233,7 +3233,7 @@
           <a:p>
             <a:fld id="{6383FAE1-13DE-4511-8C1B-C8AFB720664C}" type="datetimeFigureOut">
               <a:rPr lang="en-US" smtClean="0"/>
-              <a:t>8/29/2026</a:t>
+              <a:t>9/4/2026</a:t>
             </a:fld>
             <a:endParaRPr lang="en-US"/>
           </a:p>
@@ -3477,7 +3477,7 @@
           <a:p>
             <a:fld id="{6383FAE1-13DE-4511-8C1B-C8AFB720664C}" type="datetimeFigureOut">
               <a:rPr lang="en-US" smtClean="0"/>
-              <a:t>8/29/2026</a:t>
+              <a:t>9/4/2026</a:t>
             </a:fld>
             <a:endParaRPr lang="en-US"/>
           </a:p>
@@ -6108,7 +6108,7 @@
         <p:spPr>
           <a:xfrm>
             <a:off x="77125" y="1369964"/>
-            <a:ext cx="9377171" cy="3416320"/>
+            <a:ext cx="9555212" cy="4524315"/>
           </a:xfrm>
           <a:prstGeom prst="rect">
             <a:avLst/>
@@ -6277,6 +6277,10 @@
             </a:r>
           </a:p>
           <a:p>
+            <a:pPr marL="342900" indent="-342900">
+              <a:buFont typeface="Arial" panose="020B0604020202020204" pitchFamily="34" charset="0"/>
+              <a:buChar char="•"/>
+            </a:pPr>
             <a:r>
               <a:rPr lang="en-US" sz="2400" dirty="0">
                 <a:solidFill>
@@ -6286,10 +6290,47 @@
                   </a:schemeClr>
                 </a:solidFill>
               </a:rPr>
-              <a:t>Here a single agent is sufficient to handle this whole workflow because</a:t>
-            </a:r>
-          </a:p>
-          <a:p>
+              <a:t>Here a single agent is sufficient to handle this whole workflow because </a:t>
+            </a:r>
+            <a:r>
+              <a:rPr lang="en-US" sz="2400" b="1" i="1" dirty="0">
+                <a:solidFill>
+                  <a:schemeClr val="accent6">
+                    <a:lumMod val="60000"/>
+                    <a:lumOff val="40000"/>
+                  </a:schemeClr>
+                </a:solidFill>
+              </a:rPr>
+              <a:t>the workflow is strictly linear</a:t>
+            </a:r>
+            <a:r>
+              <a:rPr lang="en-US" sz="2400" b="1" dirty="0">
+                <a:solidFill>
+                  <a:schemeClr val="accent6">
+                    <a:lumMod val="60000"/>
+                    <a:lumOff val="40000"/>
+                  </a:schemeClr>
+                </a:solidFill>
+              </a:rPr>
+              <a:t>.</a:t>
+            </a:r>
+            <a:r>
+              <a:rPr lang="en-US" sz="2400" dirty="0">
+                <a:solidFill>
+                  <a:schemeClr val="accent6">
+                    <a:lumMod val="60000"/>
+                    <a:lumOff val="40000"/>
+                  </a:schemeClr>
+                </a:solidFill>
+              </a:rPr>
+              <a:t> Every step depends on the previous one</a:t>
+            </a:r>
+          </a:p>
+          <a:p>
+            <a:pPr marL="342900" indent="-342900">
+              <a:buFont typeface="Arial" panose="020B0604020202020204" pitchFamily="34" charset="0"/>
+              <a:buChar char="•"/>
+            </a:pPr>
             <a:endParaRPr lang="en-US" sz="2400" dirty="0">
               <a:solidFill>
                 <a:schemeClr val="accent6">
@@ -6300,22 +6341,11 @@
             </a:endParaRPr>
           </a:p>
           <a:p>
-            <a:pPr marL="285750" indent="-285750">
+            <a:pPr marL="342900" indent="-342900">
               <a:buFont typeface="Arial" panose="020B0604020202020204" pitchFamily="34" charset="0"/>
               <a:buChar char="•"/>
             </a:pPr>
             <a:r>
-              <a:rPr lang="en-US" sz="2400" b="1" dirty="0">
-                <a:solidFill>
-                  <a:schemeClr val="accent6">
-                    <a:lumMod val="60000"/>
-                    <a:lumOff val="40000"/>
-                  </a:schemeClr>
-                </a:solidFill>
-              </a:rPr>
-              <a:t>The workflow is strictly linear.</a:t>
-            </a:r>
-            <a:r>
               <a:rPr lang="en-US" sz="2400" dirty="0">
                 <a:solidFill>
                   <a:schemeClr val="accent6">
@@ -6324,8 +6354,28 @@
                   </a:schemeClr>
                 </a:solidFill>
               </a:rPr>
-              <a:t> Every step depends on the previous one:</a:t>
-            </a:r>
+              <a:t>This is a single agent using 4 different tools</a:t>
+            </a:r>
+          </a:p>
+          <a:p>
+            <a:endParaRPr lang="en-US" sz="2400" dirty="0">
+              <a:solidFill>
+                <a:schemeClr val="accent6">
+                  <a:lumMod val="60000"/>
+                  <a:lumOff val="40000"/>
+                </a:schemeClr>
+              </a:solidFill>
+            </a:endParaRPr>
+          </a:p>
+          <a:p>
+            <a:endParaRPr lang="en-US" sz="2400" dirty="0">
+              <a:solidFill>
+                <a:schemeClr val="accent6">
+                  <a:lumMod val="60000"/>
+                  <a:lumOff val="40000"/>
+                </a:schemeClr>
+              </a:solidFill>
+            </a:endParaRPr>
           </a:p>
         </p:txBody>
       </p:sp>
@@ -6829,88 +6879,6 @@
           <a:chExt cx="0" cy="0"/>
         </a:xfrm>
       </p:grpSpPr>
-      <p:cxnSp>
-        <p:nvCxnSpPr>
-          <p:cNvPr id="14" name="Straight Arrow Connector 13">
-            <a:extLst>
-              <a:ext uri="{FF2B5EF4-FFF2-40B4-BE49-F238E27FC236}">
-                <a16:creationId xmlns:a16="http://schemas.microsoft.com/office/drawing/2014/main" id="{B7A08B5B-3808-A9A0-2B3B-DA29B0899AFF}"/>
-              </a:ext>
-            </a:extLst>
-          </p:cNvPr>
-          <p:cNvCxnSpPr>
-            <a:cxnSpLocks/>
-          </p:cNvCxnSpPr>
-          <p:nvPr/>
-        </p:nvCxnSpPr>
-        <p:spPr>
-          <a:xfrm flipH="1">
-            <a:off x="9320252" y="3429000"/>
-            <a:ext cx="396240" cy="626558"/>
-          </a:xfrm>
-          <a:prstGeom prst="straightConnector1">
-            <a:avLst/>
-          </a:prstGeom>
-          <a:ln>
-            <a:tailEnd type="triangle"/>
-          </a:ln>
-        </p:spPr>
-        <p:style>
-          <a:lnRef idx="1">
-            <a:schemeClr val="accent1"/>
-          </a:lnRef>
-          <a:fillRef idx="0">
-            <a:schemeClr val="accent1"/>
-          </a:fillRef>
-          <a:effectRef idx="0">
-            <a:schemeClr val="accent1"/>
-          </a:effectRef>
-          <a:fontRef idx="minor">
-            <a:schemeClr val="tx1"/>
-          </a:fontRef>
-        </p:style>
-      </p:cxnSp>
-      <p:cxnSp>
-        <p:nvCxnSpPr>
-          <p:cNvPr id="15" name="Straight Arrow Connector 14">
-            <a:extLst>
-              <a:ext uri="{FF2B5EF4-FFF2-40B4-BE49-F238E27FC236}">
-                <a16:creationId xmlns:a16="http://schemas.microsoft.com/office/drawing/2014/main" id="{B3C669A3-497B-0792-B579-F9A216373E5B}"/>
-              </a:ext>
-            </a:extLst>
-          </p:cNvPr>
-          <p:cNvCxnSpPr>
-            <a:cxnSpLocks/>
-          </p:cNvCxnSpPr>
-          <p:nvPr/>
-        </p:nvCxnSpPr>
-        <p:spPr>
-          <a:xfrm flipH="1" flipV="1">
-            <a:off x="10103455" y="3447456"/>
-            <a:ext cx="233238" cy="625567"/>
-          </a:xfrm>
-          <a:prstGeom prst="straightConnector1">
-            <a:avLst/>
-          </a:prstGeom>
-          <a:ln>
-            <a:tailEnd type="triangle"/>
-          </a:ln>
-        </p:spPr>
-        <p:style>
-          <a:lnRef idx="1">
-            <a:schemeClr val="accent1"/>
-          </a:lnRef>
-          <a:fillRef idx="0">
-            <a:schemeClr val="accent1"/>
-          </a:fillRef>
-          <a:effectRef idx="0">
-            <a:schemeClr val="accent1"/>
-          </a:effectRef>
-          <a:fontRef idx="minor">
-            <a:schemeClr val="tx1"/>
-          </a:fontRef>
-        </p:style>
-      </p:cxnSp>
       <p:sp>
         <p:nvSpPr>
           <p:cNvPr id="3" name="TextBox 2">
@@ -8022,88 +7990,6 @@
           </a:p>
         </p:txBody>
       </p:sp>
-      <p:cxnSp>
-        <p:nvCxnSpPr>
-          <p:cNvPr id="14" name="Straight Arrow Connector 13">
-            <a:extLst>
-              <a:ext uri="{FF2B5EF4-FFF2-40B4-BE49-F238E27FC236}">
-                <a16:creationId xmlns:a16="http://schemas.microsoft.com/office/drawing/2014/main" id="{8D174B2F-5540-8349-3206-B056E24D03FF}"/>
-              </a:ext>
-            </a:extLst>
-          </p:cNvPr>
-          <p:cNvCxnSpPr>
-            <a:cxnSpLocks/>
-          </p:cNvCxnSpPr>
-          <p:nvPr/>
-        </p:nvCxnSpPr>
-        <p:spPr>
-          <a:xfrm flipH="1">
-            <a:off x="9320252" y="3429000"/>
-            <a:ext cx="396240" cy="626558"/>
-          </a:xfrm>
-          <a:prstGeom prst="straightConnector1">
-            <a:avLst/>
-          </a:prstGeom>
-          <a:ln>
-            <a:tailEnd type="triangle"/>
-          </a:ln>
-        </p:spPr>
-        <p:style>
-          <a:lnRef idx="1">
-            <a:schemeClr val="accent1"/>
-          </a:lnRef>
-          <a:fillRef idx="0">
-            <a:schemeClr val="accent1"/>
-          </a:fillRef>
-          <a:effectRef idx="0">
-            <a:schemeClr val="accent1"/>
-          </a:effectRef>
-          <a:fontRef idx="minor">
-            <a:schemeClr val="tx1"/>
-          </a:fontRef>
-        </p:style>
-      </p:cxnSp>
-      <p:cxnSp>
-        <p:nvCxnSpPr>
-          <p:cNvPr id="15" name="Straight Arrow Connector 14">
-            <a:extLst>
-              <a:ext uri="{FF2B5EF4-FFF2-40B4-BE49-F238E27FC236}">
-                <a16:creationId xmlns:a16="http://schemas.microsoft.com/office/drawing/2014/main" id="{74685C55-0217-936A-3200-F0B489843DCE}"/>
-              </a:ext>
-            </a:extLst>
-          </p:cNvPr>
-          <p:cNvCxnSpPr>
-            <a:cxnSpLocks/>
-          </p:cNvCxnSpPr>
-          <p:nvPr/>
-        </p:nvCxnSpPr>
-        <p:spPr>
-          <a:xfrm flipH="1" flipV="1">
-            <a:off x="10103455" y="3447456"/>
-            <a:ext cx="233238" cy="625567"/>
-          </a:xfrm>
-          <a:prstGeom prst="straightConnector1">
-            <a:avLst/>
-          </a:prstGeom>
-          <a:ln>
-            <a:tailEnd type="triangle"/>
-          </a:ln>
-        </p:spPr>
-        <p:style>
-          <a:lnRef idx="1">
-            <a:schemeClr val="accent1"/>
-          </a:lnRef>
-          <a:fillRef idx="0">
-            <a:schemeClr val="accent1"/>
-          </a:fillRef>
-          <a:effectRef idx="0">
-            <a:schemeClr val="accent1"/>
-          </a:effectRef>
-          <a:fontRef idx="minor">
-            <a:schemeClr val="tx1"/>
-          </a:fontRef>
-        </p:style>
-      </p:cxnSp>
       <p:sp>
         <p:nvSpPr>
           <p:cNvPr id="10" name="TextBox 9">
